--- a/classes/parte-4-seguridad-de-aplicaciones-web/111-seguridad-de-apis-graphql/clase-111-presentacion.pptx
+++ b/classes/parte-4-seguridad-de-aplicaciones-web/111-seguridad-de-apis-graphql/clase-111-presentacion.pptx
@@ -17,6 +17,9 @@
     <p:sldId id="265" r:id="rId16"/>
     <p:sldId id="266" r:id="rId17"/>
     <p:sldId id="267" r:id="rId18"/>
+    <p:sldId id="268" r:id="rId19"/>
+    <p:sldId id="269" r:id="rId20"/>
+    <p:sldId id="270" r:id="rId21"/>
   </p:sldIdLst>
   <p:sldSz cx="9144000" cy="6858000" type="screen4x3"/>
   <p:notesSz cx="6858000" cy="9144000"/>
@@ -3198,7 +3201,7 @@
                   <a:srgbClr val="0B3D2E"/>
                 </a:solidFill>
               </a:rPr>
-              <a:t>⚠️ Errores comunes</a:t>
+              <a:t>✍️ Ejercicios</a:t>
             </a:r>
           </a:p>
         </p:txBody>
@@ -3236,67 +3239,82 @@
                   <a:srgbClr val="22282E"/>
                 </a:solidFill>
               </a:rPr>
-              <a:t>•  Introspección deshabilitada — Usa clairvoyance para inferir el esquema</a:t>
-            </a:r>
-          </a:p>
-          <a:p>
-            <a:pPr>
-              <a:spcAft>
-                <a:spcPts val="600"/>
-              </a:spcAft>
-            </a:pPr>
-            <a:r>
-              <a:rPr sz="1500">
-                <a:solidFill>
-                  <a:srgbClr val="22282E"/>
-                </a:solidFill>
-              </a:rPr>
-              <a:t>•  Query da error de tipo — Sintaxis GraphQL; ajusta campos/argumentos</a:t>
-            </a:r>
-          </a:p>
-          <a:p>
-            <a:pPr>
-              <a:spcAft>
-                <a:spcPts val="600"/>
-              </a:spcAft>
-            </a:pPr>
-            <a:r>
-              <a:rPr sz="1500">
-                <a:solidFill>
-                  <a:srgbClr val="22282E"/>
-                </a:solidFill>
-              </a:rPr>
-              <a:t>•  Mutation rechazada — Requiere rol; busca otra vía o documenta fortaleza</a:t>
-            </a:r>
-          </a:p>
-          <a:p>
-            <a:pPr>
-              <a:spcAft>
-                <a:spcPts val="600"/>
-              </a:spcAft>
-            </a:pPr>
-            <a:r>
-              <a:rPr sz="1500">
-                <a:solidFill>
-                  <a:srgbClr val="22282E"/>
-                </a:solidFill>
-              </a:rPr>
-              <a:t>•  Batching ignorado — El servidor no soporta batch; usa alias</a:t>
-            </a:r>
-          </a:p>
-          <a:p>
-            <a:pPr>
-              <a:spcAft>
-                <a:spcPts val="600"/>
-              </a:spcAft>
-            </a:pPr>
-            <a:r>
-              <a:rPr sz="1500">
-                <a:solidFill>
-                  <a:srgbClr val="22282E"/>
-                </a:solidFill>
-              </a:rPr>
-              <a:t>•  DoS no reproducible — Hay límite de profundidad; documenta la defensa</a:t>
+              <a:t>•  Reconstruye el esquema de DVGA con introspección y con clairvoyance (deshabilitada).</a:t>
+            </a:r>
+          </a:p>
+          <a:p>
+            <a:pPr>
+              <a:spcAft>
+                <a:spcPts val="600"/>
+              </a:spcAft>
+            </a:pPr>
+            <a:r>
+              <a:rPr sz="1500">
+                <a:solidFill>
+                  <a:srgbClr val="22282E"/>
+                </a:solidFill>
+              </a:rPr>
+              <a:t>•  Explota un IDOR en una query y otro en una mutation.</a:t>
+            </a:r>
+          </a:p>
+          <a:p>
+            <a:pPr>
+              <a:spcAft>
+                <a:spcPts val="600"/>
+              </a:spcAft>
+            </a:pPr>
+            <a:r>
+              <a:rPr sz="1500">
+                <a:solidFill>
+                  <a:srgbClr val="22282E"/>
+                </a:solidFill>
+              </a:rPr>
+              <a:t>•  Usa alias para hacer fuerza bruta en una petición.</a:t>
+            </a:r>
+          </a:p>
+          <a:p>
+            <a:pPr>
+              <a:spcAft>
+                <a:spcPts val="600"/>
+              </a:spcAft>
+            </a:pPr>
+            <a:r>
+              <a:rPr sz="1500">
+                <a:solidFill>
+                  <a:srgbClr val="22282E"/>
+                </a:solidFill>
+              </a:rPr>
+              <a:t>•  Diseña una consulta anidada que dispare un ataque de complejidad.</a:t>
+            </a:r>
+          </a:p>
+          <a:p>
+            <a:pPr>
+              <a:spcAft>
+                <a:spcPts val="600"/>
+              </a:spcAft>
+            </a:pPr>
+            <a:r>
+              <a:rPr sz="1500">
+                <a:solidFill>
+                  <a:srgbClr val="22282E"/>
+                </a:solidFill>
+              </a:rPr>
+              <a:t>•  Explica por qué desactivar introspección en prod reduce (pero no elimina) el riesgo.</a:t>
+            </a:r>
+          </a:p>
+          <a:p>
+            <a:pPr>
+              <a:spcAft>
+                <a:spcPts val="600"/>
+              </a:spcAft>
+            </a:pPr>
+            <a:r>
+              <a:rPr sz="1500">
+                <a:solidFill>
+                  <a:srgbClr val="22282E"/>
+                </a:solidFill>
+              </a:rPr>
+              <a:t>•  Propón límites de profundidad/complejidad y authz por resolver.</a:t>
             </a:r>
           </a:p>
         </p:txBody>
@@ -3347,7 +3365,7 @@
                   <a:srgbClr val="0B3D2E"/>
                 </a:solidFill>
               </a:rPr>
-              <a:t>❓ Preguntas frecuentes</a:t>
+              <a:t>📝 Reto verificable</a:t>
             </a:r>
           </a:p>
         </p:txBody>
@@ -3385,82 +3403,22 @@
                   <a:srgbClr val="22282E"/>
                 </a:solidFill>
               </a:rPr>
-              <a:t>•  ❓ ¿GraphQL es más inseguro que REST?</a:t>
-            </a:r>
-          </a:p>
-          <a:p>
-            <a:pPr>
-              <a:spcAft>
-                <a:spcPts val="600"/>
-              </a:spcAft>
-            </a:pPr>
-            <a:r>
-              <a:rPr sz="1500">
-                <a:solidFill>
-                  <a:srgbClr val="22282E"/>
-                </a:solidFill>
-              </a:rPr>
-              <a:t>•  No inherentemente, pero su flexibilidad y la introspección amplían la superficie y a menudo la autorización está peor implementada.</a:t>
-            </a:r>
-          </a:p>
-          <a:p>
-            <a:pPr>
-              <a:spcAft>
-                <a:spcPts val="600"/>
-              </a:spcAft>
-            </a:pPr>
-            <a:r>
-              <a:rPr sz="1500">
-                <a:solidFill>
-                  <a:srgbClr val="22282E"/>
-                </a:solidFill>
-              </a:rPr>
-              <a:t>•  ❓ ¿Basta con desactivar la introspección?</a:t>
-            </a:r>
-          </a:p>
-          <a:p>
-            <a:pPr>
-              <a:spcAft>
-                <a:spcPts val="600"/>
-              </a:spcAft>
-            </a:pPr>
-            <a:r>
-              <a:rPr sz="1500">
-                <a:solidFill>
-                  <a:srgbClr val="22282E"/>
-                </a:solidFill>
-              </a:rPr>
-              <a:t>•  Ayuda, pero un atacante puede inferir el esquema (clairvoyance). La defensa real es authz por resolver y límites de complejidad.</a:t>
-            </a:r>
-          </a:p>
-          <a:p>
-            <a:pPr>
-              <a:spcAft>
-                <a:spcPts val="600"/>
-              </a:spcAft>
-            </a:pPr>
-            <a:r>
-              <a:rPr sz="1500">
-                <a:solidFill>
-                  <a:srgbClr val="22282E"/>
-                </a:solidFill>
-              </a:rPr>
-              <a:t>•  ❓ ¿Por qué el batching es peligroso?</a:t>
-            </a:r>
-          </a:p>
-          <a:p>
-            <a:pPr>
-              <a:spcAft>
-                <a:spcPts val="600"/>
-              </a:spcAft>
-            </a:pPr>
-            <a:r>
-              <a:rPr sz="1500">
-                <a:solidFill>
-                  <a:srgbClr val="22282E"/>
-                </a:solidFill>
-              </a:rPr>
-              <a:t>•  Permite empaquetar muchas operaciones en una petición, eludiendo rate limits diseñados para contar peticiones, no operaciones.</a:t>
+              <a:t>•  En DVGA, obtén el esquema por introspección, explota una autorización rota (query o mutation) y demuestra un bypass de rate limit con batching/alias.</a:t>
+            </a:r>
+          </a:p>
+          <a:p>
+            <a:pPr>
+              <a:spcAft>
+                <a:spcPts val="600"/>
+              </a:spcAft>
+            </a:pPr>
+            <a:r>
+              <a:rPr sz="1500">
+                <a:solidFill>
+                  <a:srgbClr val="22282E"/>
+                </a:solidFill>
+              </a:rPr>
+              <a:t>•  Criterio de aceptación: entregas el esquema, la operación no autorizada con su evidencia y el batching que elude el límite, más la defensa (introspección off, authz por resolver, límites de…</a:t>
             </a:r>
           </a:p>
         </p:txBody>
@@ -3511,7 +3469,7 @@
                   <a:srgbClr val="0B3D2E"/>
                 </a:solidFill>
               </a:rPr>
-              <a:t>🔗 Referencias</a:t>
+              <a:t>⚠️ Errores comunes</a:t>
             </a:r>
           </a:p>
         </p:txBody>
@@ -3549,6 +3507,319 @@
                   <a:srgbClr val="22282E"/>
                 </a:solidFill>
               </a:rPr>
+              <a:t>•  Introspección deshabilitada — Usa clairvoyance para inferir el esquema</a:t>
+            </a:r>
+          </a:p>
+          <a:p>
+            <a:pPr>
+              <a:spcAft>
+                <a:spcPts val="600"/>
+              </a:spcAft>
+            </a:pPr>
+            <a:r>
+              <a:rPr sz="1500">
+                <a:solidFill>
+                  <a:srgbClr val="22282E"/>
+                </a:solidFill>
+              </a:rPr>
+              <a:t>•  Query da error de tipo — Sintaxis GraphQL; ajusta campos/argumentos</a:t>
+            </a:r>
+          </a:p>
+          <a:p>
+            <a:pPr>
+              <a:spcAft>
+                <a:spcPts val="600"/>
+              </a:spcAft>
+            </a:pPr>
+            <a:r>
+              <a:rPr sz="1500">
+                <a:solidFill>
+                  <a:srgbClr val="22282E"/>
+                </a:solidFill>
+              </a:rPr>
+              <a:t>•  Mutation rechazada — Requiere rol; busca otra vía o documenta fortaleza</a:t>
+            </a:r>
+          </a:p>
+          <a:p>
+            <a:pPr>
+              <a:spcAft>
+                <a:spcPts val="600"/>
+              </a:spcAft>
+            </a:pPr>
+            <a:r>
+              <a:rPr sz="1500">
+                <a:solidFill>
+                  <a:srgbClr val="22282E"/>
+                </a:solidFill>
+              </a:rPr>
+              <a:t>•  Batching ignorado — El servidor no soporta batch; usa alias</a:t>
+            </a:r>
+          </a:p>
+          <a:p>
+            <a:pPr>
+              <a:spcAft>
+                <a:spcPts val="600"/>
+              </a:spcAft>
+            </a:pPr>
+            <a:r>
+              <a:rPr sz="1500">
+                <a:solidFill>
+                  <a:srgbClr val="22282E"/>
+                </a:solidFill>
+              </a:rPr>
+              <a:t>•  DoS no reproducible — Hay límite de profundidad; documenta la defensa</a:t>
+            </a:r>
+          </a:p>
+        </p:txBody>
+      </p:sp>
+    </p:spTree>
+  </p:cSld>
+  <p:clrMapOvr>
+    <a:masterClrMapping/>
+  </p:clrMapOvr>
+</p:sld>
+</file>
+
+<file path=ppt/slides/slide13.xml><?xml version="1.0" encoding="utf-8"?>
+<p:sld xmlns:a="http://schemas.openxmlformats.org/drawingml/2006/main" xmlns:p="http://schemas.openxmlformats.org/presentationml/2006/main" xmlns:r="http://schemas.openxmlformats.org/officeDocument/2006/relationships">
+  <p:cSld>
+    <p:spTree>
+      <p:nvGrpSpPr>
+        <p:cNvPr id="1" name=""/>
+        <p:cNvGrpSpPr/>
+        <p:nvPr/>
+      </p:nvGrpSpPr>
+      <p:grpSpPr/>
+      <p:sp>
+        <p:nvSpPr>
+          <p:cNvPr id="2" name="TextBox 1"/>
+          <p:cNvSpPr txBox="1"/>
+          <p:nvPr/>
+        </p:nvSpPr>
+        <p:spPr>
+          <a:xfrm>
+            <a:off x="457200" y="320040"/>
+            <a:ext cx="8229600" cy="822960"/>
+          </a:xfrm>
+          <a:prstGeom prst="rect">
+            <a:avLst/>
+          </a:prstGeom>
+          <a:noFill/>
+        </p:spPr>
+        <p:txBody>
+          <a:bodyPr wrap="square">
+            <a:spAutoFit/>
+          </a:bodyPr>
+          <a:lstStyle/>
+          <a:p>
+            <a:r>
+              <a:rPr sz="2600" b="1">
+                <a:solidFill>
+                  <a:srgbClr val="0B3D2E"/>
+                </a:solidFill>
+              </a:rPr>
+              <a:t>❓ Preguntas frecuentes</a:t>
+            </a:r>
+          </a:p>
+        </p:txBody>
+      </p:sp>
+      <p:sp>
+        <p:nvSpPr>
+          <p:cNvPr id="3" name="TextBox 2"/>
+          <p:cNvSpPr txBox="1"/>
+          <p:nvPr/>
+        </p:nvSpPr>
+        <p:spPr>
+          <a:xfrm>
+            <a:off x="457200" y="1280160"/>
+            <a:ext cx="8229600" cy="4937760"/>
+          </a:xfrm>
+          <a:prstGeom prst="rect">
+            <a:avLst/>
+          </a:prstGeom>
+          <a:noFill/>
+        </p:spPr>
+        <p:txBody>
+          <a:bodyPr wrap="square">
+            <a:spAutoFit/>
+          </a:bodyPr>
+          <a:lstStyle/>
+          <a:p>
+            <a:pPr>
+              <a:spcAft>
+                <a:spcPts val="600"/>
+              </a:spcAft>
+            </a:pPr>
+            <a:r>
+              <a:rPr sz="1500">
+                <a:solidFill>
+                  <a:srgbClr val="22282E"/>
+                </a:solidFill>
+              </a:rPr>
+              <a:t>•  ❓ ¿GraphQL es más inseguro que REST?</a:t>
+            </a:r>
+          </a:p>
+          <a:p>
+            <a:pPr>
+              <a:spcAft>
+                <a:spcPts val="600"/>
+              </a:spcAft>
+            </a:pPr>
+            <a:r>
+              <a:rPr sz="1500">
+                <a:solidFill>
+                  <a:srgbClr val="22282E"/>
+                </a:solidFill>
+              </a:rPr>
+              <a:t>•  No inherentemente, pero su flexibilidad y la introspección amplían la superficie y a menudo la autorización está peor implementada.</a:t>
+            </a:r>
+          </a:p>
+          <a:p>
+            <a:pPr>
+              <a:spcAft>
+                <a:spcPts val="600"/>
+              </a:spcAft>
+            </a:pPr>
+            <a:r>
+              <a:rPr sz="1500">
+                <a:solidFill>
+                  <a:srgbClr val="22282E"/>
+                </a:solidFill>
+              </a:rPr>
+              <a:t>•  ❓ ¿Basta con desactivar la introspección?</a:t>
+            </a:r>
+          </a:p>
+          <a:p>
+            <a:pPr>
+              <a:spcAft>
+                <a:spcPts val="600"/>
+              </a:spcAft>
+            </a:pPr>
+            <a:r>
+              <a:rPr sz="1500">
+                <a:solidFill>
+                  <a:srgbClr val="22282E"/>
+                </a:solidFill>
+              </a:rPr>
+              <a:t>•  Ayuda, pero un atacante puede inferir el esquema (clairvoyance). La defensa real es authz por resolver y límites de complejidad.</a:t>
+            </a:r>
+          </a:p>
+          <a:p>
+            <a:pPr>
+              <a:spcAft>
+                <a:spcPts val="600"/>
+              </a:spcAft>
+            </a:pPr>
+            <a:r>
+              <a:rPr sz="1500">
+                <a:solidFill>
+                  <a:srgbClr val="22282E"/>
+                </a:solidFill>
+              </a:rPr>
+              <a:t>•  ❓ ¿Por qué el batching es peligroso?</a:t>
+            </a:r>
+          </a:p>
+          <a:p>
+            <a:pPr>
+              <a:spcAft>
+                <a:spcPts val="600"/>
+              </a:spcAft>
+            </a:pPr>
+            <a:r>
+              <a:rPr sz="1500">
+                <a:solidFill>
+                  <a:srgbClr val="22282E"/>
+                </a:solidFill>
+              </a:rPr>
+              <a:t>•  Permite empaquetar muchas operaciones en una petición, eludiendo rate limits diseñados para contar peticiones, no operaciones.</a:t>
+            </a:r>
+          </a:p>
+        </p:txBody>
+      </p:sp>
+    </p:spTree>
+  </p:cSld>
+  <p:clrMapOvr>
+    <a:masterClrMapping/>
+  </p:clrMapOvr>
+</p:sld>
+</file>
+
+<file path=ppt/slides/slide14.xml><?xml version="1.0" encoding="utf-8"?>
+<p:sld xmlns:a="http://schemas.openxmlformats.org/drawingml/2006/main" xmlns:p="http://schemas.openxmlformats.org/presentationml/2006/main" xmlns:r="http://schemas.openxmlformats.org/officeDocument/2006/relationships">
+  <p:cSld>
+    <p:spTree>
+      <p:nvGrpSpPr>
+        <p:cNvPr id="1" name=""/>
+        <p:cNvGrpSpPr/>
+        <p:nvPr/>
+      </p:nvGrpSpPr>
+      <p:grpSpPr/>
+      <p:sp>
+        <p:nvSpPr>
+          <p:cNvPr id="2" name="TextBox 1"/>
+          <p:cNvSpPr txBox="1"/>
+          <p:nvPr/>
+        </p:nvSpPr>
+        <p:spPr>
+          <a:xfrm>
+            <a:off x="457200" y="320040"/>
+            <a:ext cx="8229600" cy="822960"/>
+          </a:xfrm>
+          <a:prstGeom prst="rect">
+            <a:avLst/>
+          </a:prstGeom>
+          <a:noFill/>
+        </p:spPr>
+        <p:txBody>
+          <a:bodyPr wrap="square">
+            <a:spAutoFit/>
+          </a:bodyPr>
+          <a:lstStyle/>
+          <a:p>
+            <a:r>
+              <a:rPr sz="2600" b="1">
+                <a:solidFill>
+                  <a:srgbClr val="0B3D2E"/>
+                </a:solidFill>
+              </a:rPr>
+              <a:t>🔗 Referencias</a:t>
+            </a:r>
+          </a:p>
+        </p:txBody>
+      </p:sp>
+      <p:sp>
+        <p:nvSpPr>
+          <p:cNvPr id="3" name="TextBox 2"/>
+          <p:cNvSpPr txBox="1"/>
+          <p:nvPr/>
+        </p:nvSpPr>
+        <p:spPr>
+          <a:xfrm>
+            <a:off x="457200" y="1280160"/>
+            <a:ext cx="8229600" cy="4937760"/>
+          </a:xfrm>
+          <a:prstGeom prst="rect">
+            <a:avLst/>
+          </a:prstGeom>
+          <a:noFill/>
+        </p:spPr>
+        <p:txBody>
+          <a:bodyPr wrap="square">
+            <a:spAutoFit/>
+          </a:bodyPr>
+          <a:lstStyle/>
+          <a:p>
+            <a:pPr>
+              <a:spcAft>
+                <a:spcPts val="600"/>
+              </a:spcAft>
+            </a:pPr>
+            <a:r>
+              <a:rPr sz="1500">
+                <a:solidFill>
+                  <a:srgbClr val="22282E"/>
+                </a:solidFill>
+              </a:rPr>
               <a:t>•  PortSwigger GraphQL API vulnerabilities: &lt;https://portswigger.net/web-security/graphql&gt;</a:t>
             </a:r>
           </a:p>
@@ -3599,6 +3870,81 @@
           </a:p>
         </p:txBody>
       </p:sp>
+    </p:spTree>
+  </p:cSld>
+  <p:clrMapOvr>
+    <a:masterClrMapping/>
+  </p:clrMapOvr>
+</p:sld>
+</file>
+
+<file path=ppt/slides/slide15.xml><?xml version="1.0" encoding="utf-8"?>
+<p:sld xmlns:a="http://schemas.openxmlformats.org/drawingml/2006/main" xmlns:p="http://schemas.openxmlformats.org/presentationml/2006/main" xmlns:r="http://schemas.openxmlformats.org/officeDocument/2006/relationships">
+  <p:cSld>
+    <p:spTree>
+      <p:nvGrpSpPr>
+        <p:cNvPr id="1" name=""/>
+        <p:cNvGrpSpPr/>
+        <p:nvPr/>
+      </p:nvGrpSpPr>
+      <p:grpSpPr/>
+      <p:sp>
+        <p:nvSpPr>
+          <p:cNvPr id="2" name="TextBox 1"/>
+          <p:cNvSpPr txBox="1"/>
+          <p:nvPr/>
+        </p:nvSpPr>
+        <p:spPr>
+          <a:xfrm>
+            <a:off x="457200" y="274320"/>
+            <a:ext cx="8229600" cy="640080"/>
+          </a:xfrm>
+          <a:prstGeom prst="rect">
+            <a:avLst/>
+          </a:prstGeom>
+          <a:noFill/>
+        </p:spPr>
+        <p:txBody>
+          <a:bodyPr wrap="square">
+            <a:spAutoFit/>
+          </a:bodyPr>
+          <a:lstStyle/>
+          <a:p>
+            <a:r>
+              <a:rPr sz="2200" b="1">
+                <a:solidFill>
+                  <a:srgbClr val="0B3D2E"/>
+                </a:solidFill>
+              </a:rPr>
+              <a:t>Diagrama de la clase</a:t>
+            </a:r>
+          </a:p>
+        </p:txBody>
+      </p:sp>
+      <p:pic>
+        <p:nvPicPr>
+          <p:cNvPr id="3" name="Picture 2" descr="03424b1f8d9ce611.png"/>
+          <p:cNvPicPr>
+            <a:picLocks noChangeAspect="1"/>
+          </p:cNvPicPr>
+          <p:nvPr/>
+        </p:nvPicPr>
+        <p:blipFill>
+          <a:blip r:embed="rId2"/>
+          <a:stretch>
+            <a:fillRect/>
+          </a:stretch>
+        </p:blipFill>
+        <p:spPr>
+          <a:xfrm>
+            <a:off x="457200" y="1226904"/>
+            <a:ext cx="8229600" cy="5044272"/>
+          </a:xfrm>
+          <a:prstGeom prst="rect">
+            <a:avLst/>
+          </a:prstGeom>
+        </p:spPr>
+      </p:pic>
     </p:spTree>
   </p:cSld>
   <p:clrMapOvr>
@@ -3683,7 +4029,7 @@
                   <a:srgbClr val="22282E"/>
                 </a:solidFill>
               </a:rPr>
-              <a:t>•  Auditar la seguridad de APIs GraphQL, cada vez más comunes. GraphQL cambia el modelo (un único endpoint, consultas flexibles) e introduce riesgos propios: introspección, over-fetching, ataques de complejidad (DoS), y los mismos problemas de autorización que REST, a menudo peor gestionados.</a:t>
+              <a:t>•  Auditar la seguridad de APIs GraphQL, cada vez más comunes. GraphQL cambia el modelo (un único endpoint, consultas flexibles) e introduce riesgos propios: introspección, over-fetching, ataques de…</a:t>
             </a:r>
           </a:p>
         </p:txBody>
@@ -4077,7 +4423,7 @@
                   <a:srgbClr val="0B3D2E"/>
                 </a:solidFill>
               </a:rPr>
-              <a:t>📖 Definiciones y características</a:t>
+              <a:t>🧠 Explicación en profundidad</a:t>
             </a:r>
           </a:p>
         </p:txBody>
@@ -4115,82 +4461,97 @@
                   <a:srgbClr val="22282E"/>
                 </a:solidFill>
               </a:rPr>
-              <a:t>•  GraphQL: lenguaje de consulta con un único endpoint donde el cliente define qué datos quiere. Característica: flexibilidad que amplía la superficie.</a:t>
-            </a:r>
-          </a:p>
-          <a:p>
-            <a:pPr>
-              <a:spcAft>
-                <a:spcPts val="600"/>
-              </a:spcAft>
-            </a:pPr>
-            <a:r>
-              <a:rPr sz="1500">
-                <a:solidFill>
-                  <a:srgbClr val="22282E"/>
-                </a:solidFill>
-              </a:rPr>
-              <a:t>•  Introspección: capacidad de consultar el propio esquema. Característica: revela todos los tipos y campos; peligrosa en producción.</a:t>
-            </a:r>
-          </a:p>
-          <a:p>
-            <a:pPr>
-              <a:spcAft>
-                <a:spcPts val="600"/>
-              </a:spcAft>
-            </a:pPr>
-            <a:r>
-              <a:rPr sz="1500">
-                <a:solidFill>
-                  <a:srgbClr val="22282E"/>
-                </a:solidFill>
-              </a:rPr>
-              <a:t>•  Resolver: función que resuelve un campo. Característica: si no valida authz, hay IDOR/BOLA.</a:t>
-            </a:r>
-          </a:p>
-          <a:p>
-            <a:pPr>
-              <a:spcAft>
-                <a:spcPts val="600"/>
-              </a:spcAft>
-            </a:pPr>
-            <a:r>
-              <a:rPr sz="1500">
-                <a:solidFill>
-                  <a:srgbClr val="22282E"/>
-                </a:solidFill>
-              </a:rPr>
-              <a:t>•  Batching: enviar múltiples operaciones en una petición. Característica: puede eludir rate limiting (p. ej. fuerza bruta).</a:t>
-            </a:r>
-          </a:p>
-          <a:p>
-            <a:pPr>
-              <a:spcAft>
-                <a:spcPts val="600"/>
-              </a:spcAft>
-            </a:pPr>
-            <a:r>
-              <a:rPr sz="1500">
-                <a:solidFill>
-                  <a:srgbClr val="22282E"/>
-                </a:solidFill>
-              </a:rPr>
-              <a:t>•  Alias: renombrar campos para repetir una consulta muchas veces. Característica: amplifica ataques en una sola petición.</a:t>
-            </a:r>
-          </a:p>
-          <a:p>
-            <a:pPr>
-              <a:spcAft>
-                <a:spcPts val="600"/>
-              </a:spcAft>
-            </a:pPr>
-            <a:r>
-              <a:rPr sz="1500">
-                <a:solidFill>
-                  <a:srgbClr val="22282E"/>
-                </a:solidFill>
-              </a:rPr>
-              <a:t>•  Ataque de complejidad: consulta profundamente anidada que agota recursos. Característica: DoS sin gran volumen de peticiones.</a:t>
+              <a:t>•  GraphQL cambia el modelo de las APIs REST: en lugar de muchos endpoints fijos, hay un solo</a:t>
+            </a:r>
+          </a:p>
+          <a:p>
+            <a:pPr>
+              <a:spcAft>
+                <a:spcPts val="600"/>
+              </a:spcAft>
+            </a:pPr>
+            <a:r>
+              <a:rPr sz="1500">
+                <a:solidFill>
+                  <a:srgbClr val="22282E"/>
+                </a:solidFill>
+              </a:rPr>
+              <a:t>•  endpoint (/graphql) al que el cliente envía consultas que especifican exactamente qué datos</a:t>
+            </a:r>
+          </a:p>
+          <a:p>
+            <a:pPr>
+              <a:spcAft>
+                <a:spcPts val="600"/>
+              </a:spcAft>
+            </a:pPr>
+            <a:r>
+              <a:rPr sz="1500">
+                <a:solidFill>
+                  <a:srgbClr val="22282E"/>
+                </a:solidFill>
+              </a:rPr>
+              <a:t>•  quiere, con qué campos y qué relaciones. Esa flexibilidad —pedir en una consulta lo que en REST serían</a:t>
+            </a:r>
+          </a:p>
+          <a:p>
+            <a:pPr>
+              <a:spcAft>
+                <a:spcPts val="600"/>
+              </a:spcAft>
+            </a:pPr>
+            <a:r>
+              <a:rPr sz="1500">
+                <a:solidFill>
+                  <a:srgbClr val="22282E"/>
+                </a:solidFill>
+              </a:rPr>
+              <a:t>•  varias llamadas— es su virtud y también su superficie de ataque particular. Muchas defensas</a:t>
+            </a:r>
+          </a:p>
+          <a:p>
+            <a:pPr>
+              <a:spcAft>
+                <a:spcPts val="600"/>
+              </a:spcAft>
+            </a:pPr>
+            <a:r>
+              <a:rPr sz="1500">
+                <a:solidFill>
+                  <a:srgbClr val="22282E"/>
+                </a:solidFill>
+              </a:rPr>
+              <a:t>•  mentales de REST no aplican: no hay "endpoints ocultos" que enumerar (el esquema los expone todos),</a:t>
+            </a:r>
+          </a:p>
+          <a:p>
+            <a:pPr>
+              <a:spcAft>
+                <a:spcPts val="600"/>
+              </a:spcAft>
+            </a:pPr>
+            <a:r>
+              <a:rPr sz="1500">
+                <a:solidFill>
+                  <a:srgbClr val="22282E"/>
+                </a:solidFill>
+              </a:rPr>
+              <a:t>•  pero aparecen problemas nuevos —la autorización dispersa en cada resolver, los ataques de complejidad,</a:t>
+            </a:r>
+          </a:p>
+          <a:p>
+            <a:pPr>
+              <a:spcAft>
+                <a:spcPts val="600"/>
+              </a:spcAft>
+            </a:pPr>
+            <a:r>
+              <a:rPr sz="1500">
+                <a:solidFill>
+                  <a:srgbClr val="22282E"/>
+                </a:solidFill>
+              </a:rPr>
+              <a:t>•  la introspección que regala el mapa completo—. Distinguir queries (leen datos) de mutations</a:t>
             </a:r>
           </a:p>
         </p:txBody>
@@ -4241,7 +4602,7 @@
                   <a:srgbClr val="0B3D2E"/>
                 </a:solidFill>
               </a:rPr>
-              <a:t>🧰 Herramientas y preparación</a:t>
+              <a:t>📖 Definiciones y características</a:t>
             </a:r>
           </a:p>
         </p:txBody>
@@ -4279,67 +4640,82 @@
                   <a:srgbClr val="22282E"/>
                 </a:solidFill>
               </a:rPr>
-              <a:t>•  GraphiQL/Altair o Burp con extensiones InQL.</a:t>
-            </a:r>
-          </a:p>
-          <a:p>
-            <a:pPr>
-              <a:spcAft>
-                <a:spcPts val="600"/>
-              </a:spcAft>
-            </a:pPr>
-            <a:r>
-              <a:rPr sz="1500">
-                <a:solidFill>
-                  <a:srgbClr val="22282E"/>
-                </a:solidFill>
-              </a:rPr>
-              <a:t>•  DVGA (Damn Vulnerable GraphQL Application) como lab.</a:t>
-            </a:r>
-          </a:p>
-          <a:p>
-            <a:pPr>
-              <a:spcAft>
-                <a:spcPts val="600"/>
-              </a:spcAft>
-            </a:pPr>
-            <a:r>
-              <a:rPr sz="1500">
-                <a:solidFill>
-                  <a:srgbClr val="22282E"/>
-                </a:solidFill>
-              </a:rPr>
-              <a:t>•  clairvoyance para reconstruir esquema si la introspección está deshabilitada.</a:t>
-            </a:r>
-          </a:p>
-          <a:p>
-            <a:pPr>
-              <a:spcAft>
-                <a:spcPts val="600"/>
-              </a:spcAft>
-            </a:pPr>
-            <a:r>
-              <a:rPr sz="1500">
-                <a:solidFill>
-                  <a:srgbClr val="22282E"/>
-                </a:solidFill>
-              </a:rPr>
-              <a:t>•  git clone https://github.com/dolevf/Damn-Vulnerable-GraphQL-Application</a:t>
-            </a:r>
-          </a:p>
-          <a:p>
-            <a:pPr>
-              <a:spcAft>
-                <a:spcPts val="600"/>
-              </a:spcAft>
-            </a:pPr>
-            <a:r>
-              <a:rPr sz="1500">
-                <a:solidFill>
-                  <a:srgbClr val="22282E"/>
-                </a:solidFill>
-              </a:rPr>
-              <a:t>•  docker run -t -p 5013:5013 dolevf/dvga</a:t>
+              <a:t>•  GraphQL: lenguaje de consulta con un único endpoint donde el cliente define qué datos quiere. Característica: flexibilidad que amplía la superficie.</a:t>
+            </a:r>
+          </a:p>
+          <a:p>
+            <a:pPr>
+              <a:spcAft>
+                <a:spcPts val="600"/>
+              </a:spcAft>
+            </a:pPr>
+            <a:r>
+              <a:rPr sz="1500">
+                <a:solidFill>
+                  <a:srgbClr val="22282E"/>
+                </a:solidFill>
+              </a:rPr>
+              <a:t>•  Introspección: capacidad de consultar el propio esquema. Característica: revela todos los tipos y campos; peligrosa en producción.</a:t>
+            </a:r>
+          </a:p>
+          <a:p>
+            <a:pPr>
+              <a:spcAft>
+                <a:spcPts val="600"/>
+              </a:spcAft>
+            </a:pPr>
+            <a:r>
+              <a:rPr sz="1500">
+                <a:solidFill>
+                  <a:srgbClr val="22282E"/>
+                </a:solidFill>
+              </a:rPr>
+              <a:t>•  Resolver: función que resuelve un campo. Característica: si no valida authz, hay IDOR/BOLA.</a:t>
+            </a:r>
+          </a:p>
+          <a:p>
+            <a:pPr>
+              <a:spcAft>
+                <a:spcPts val="600"/>
+              </a:spcAft>
+            </a:pPr>
+            <a:r>
+              <a:rPr sz="1500">
+                <a:solidFill>
+                  <a:srgbClr val="22282E"/>
+                </a:solidFill>
+              </a:rPr>
+              <a:t>•  Batching: enviar múltiples operaciones en una petición. Característica: puede eludir rate limiting (p. ej. fuerza bruta).</a:t>
+            </a:r>
+          </a:p>
+          <a:p>
+            <a:pPr>
+              <a:spcAft>
+                <a:spcPts val="600"/>
+              </a:spcAft>
+            </a:pPr>
+            <a:r>
+              <a:rPr sz="1500">
+                <a:solidFill>
+                  <a:srgbClr val="22282E"/>
+                </a:solidFill>
+              </a:rPr>
+              <a:t>•  Alias: renombrar campos para repetir una consulta muchas veces. Característica: amplifica ataques en una sola petición.</a:t>
+            </a:r>
+          </a:p>
+          <a:p>
+            <a:pPr>
+              <a:spcAft>
+                <a:spcPts val="600"/>
+              </a:spcAft>
+            </a:pPr>
+            <a:r>
+              <a:rPr sz="1500">
+                <a:solidFill>
+                  <a:srgbClr val="22282E"/>
+                </a:solidFill>
+              </a:rPr>
+              <a:t>•  Ataque de complejidad: consulta profundamente anidada que agota recursos. Característica: DoS sin gran volumen de peticiones.</a:t>
             </a:r>
           </a:p>
         </p:txBody>
@@ -4390,7 +4766,7 @@
                   <a:srgbClr val="0B3D2E"/>
                 </a:solidFill>
               </a:rPr>
-              <a:t>🧪 Laboratorio guiado</a:t>
+              <a:t>📔 Glosario</a:t>
             </a:r>
           </a:p>
         </p:txBody>
@@ -4428,97 +4804,97 @@
                   <a:srgbClr val="22282E"/>
                 </a:solidFill>
               </a:rPr>
-              <a:t>•  Localiza el endpoint GraphQL (/graphql, /api/graphql) y prueba la introspección:</a:t>
-            </a:r>
-          </a:p>
-          <a:p>
-            <a:pPr>
-              <a:spcAft>
-                <a:spcPts val="600"/>
-              </a:spcAft>
-            </a:pPr>
-            <a:r>
-              <a:rPr sz="1500">
-                <a:solidFill>
-                  <a:srgbClr val="22282E"/>
-                </a:solidFill>
-              </a:rPr>
-              <a:t>•  { schema { types { name fields { name } } } }</a:t>
-            </a:r>
-          </a:p>
-          <a:p>
-            <a:pPr>
-              <a:spcAft>
-                <a:spcPts val="600"/>
-              </a:spcAft>
-            </a:pPr>
-            <a:r>
-              <a:rPr sz="1500">
-                <a:solidFill>
-                  <a:srgbClr val="22282E"/>
-                </a:solidFill>
-              </a:rPr>
-              <a:t>•  Con InQL, genera el mapa de queries y mutations disponibles.</a:t>
-            </a:r>
-          </a:p>
-          <a:p>
-            <a:pPr>
-              <a:spcAft>
-                <a:spcPts val="600"/>
-              </a:spcAft>
-            </a:pPr>
-            <a:r>
-              <a:rPr sz="1500">
-                <a:solidFill>
-                  <a:srgbClr val="22282E"/>
-                </a:solidFill>
-              </a:rPr>
-              <a:t>•  Prueba IDOR/BOLA: consulta un objeto por ID que no es tuyo (user(id: 2){ email }).</a:t>
-            </a:r>
-          </a:p>
-          <a:p>
-            <a:pPr>
-              <a:spcAft>
-                <a:spcPts val="600"/>
-              </a:spcAft>
-            </a:pPr>
-            <a:r>
-              <a:rPr sz="1500">
-                <a:solidFill>
-                  <a:srgbClr val="22282E"/>
-                </a:solidFill>
-              </a:rPr>
-              <a:t>•  Ejecuta una mutation sensible sin el rol adecuado (autorización rota).</a:t>
-            </a:r>
-          </a:p>
-          <a:p>
-            <a:pPr>
-              <a:spcAft>
-                <a:spcPts val="600"/>
-              </a:spcAft>
-            </a:pPr>
-            <a:r>
-              <a:rPr sz="1500">
-                <a:solidFill>
-                  <a:srgbClr val="22282E"/>
-                </a:solidFill>
-              </a:rPr>
-              <a:t>•  Usa alias/batching para repetir un login muchas veces en una sola petición (fuerza bruta sin rate limit).</a:t>
-            </a:r>
-          </a:p>
-          <a:p>
-            <a:pPr>
-              <a:spcAft>
-                <a:spcPts val="600"/>
-              </a:spcAft>
-            </a:pPr>
-            <a:r>
-              <a:rPr sz="1500">
-                <a:solidFill>
-                  <a:srgbClr val="22282E"/>
-                </a:solidFill>
-              </a:rPr>
-              <a:t>•  Lanza una consulta profundamente anidada para evaluar el riesgo de DoS por complejidad.</a:t>
+              <a:t>•  Término — Definición concisa</a:t>
+            </a:r>
+          </a:p>
+          <a:p>
+            <a:pPr>
+              <a:spcAft>
+                <a:spcPts val="600"/>
+              </a:spcAft>
+            </a:pPr>
+            <a:r>
+              <a:rPr sz="1500">
+                <a:solidFill>
+                  <a:srgbClr val="22282E"/>
+                </a:solidFill>
+              </a:rPr>
+              <a:t>•  GraphQL — API de un solo endpoint con lenguaje de consulta</a:t>
+            </a:r>
+          </a:p>
+          <a:p>
+            <a:pPr>
+              <a:spcAft>
+                <a:spcPts val="600"/>
+              </a:spcAft>
+            </a:pPr>
+            <a:r>
+              <a:rPr sz="1500">
+                <a:solidFill>
+                  <a:srgbClr val="22282E"/>
+                </a:solidFill>
+              </a:rPr>
+              <a:t>•  Query — Operación que lee datos</a:t>
+            </a:r>
+          </a:p>
+          <a:p>
+            <a:pPr>
+              <a:spcAft>
+                <a:spcPts val="600"/>
+              </a:spcAft>
+            </a:pPr>
+            <a:r>
+              <a:rPr sz="1500">
+                <a:solidFill>
+                  <a:srgbClr val="22282E"/>
+                </a:solidFill>
+              </a:rPr>
+              <a:t>•  Mutation — Operación que modifica datos</a:t>
+            </a:r>
+          </a:p>
+          <a:p>
+            <a:pPr>
+              <a:spcAft>
+                <a:spcPts val="600"/>
+              </a:spcAft>
+            </a:pPr>
+            <a:r>
+              <a:rPr sz="1500">
+                <a:solidFill>
+                  <a:srgbClr val="22282E"/>
+                </a:solidFill>
+              </a:rPr>
+              <a:t>•  Resolver — Función que resuelve cada campo de una consulta</a:t>
+            </a:r>
+          </a:p>
+          <a:p>
+            <a:pPr>
+              <a:spcAft>
+                <a:spcPts val="600"/>
+              </a:spcAft>
+            </a:pPr>
+            <a:r>
+              <a:rPr sz="1500">
+                <a:solidFill>
+                  <a:srgbClr val="22282E"/>
+                </a:solidFill>
+              </a:rPr>
+              <a:t>•  Introspección — Consultar el propio esquema de la API</a:t>
+            </a:r>
+          </a:p>
+          <a:p>
+            <a:pPr>
+              <a:spcAft>
+                <a:spcPts val="600"/>
+              </a:spcAft>
+            </a:pPr>
+            <a:r>
+              <a:rPr sz="1500">
+                <a:solidFill>
+                  <a:srgbClr val="22282E"/>
+                </a:solidFill>
+              </a:rPr>
+              <a:t>•  Esquema — Todos los tipos, campos y operaciones disponibles</a:t>
             </a:r>
           </a:p>
         </p:txBody>
@@ -4569,7 +4945,7 @@
                   <a:srgbClr val="0B3D2E"/>
                 </a:solidFill>
               </a:rPr>
-              <a:t>✍️ Ejercicios</a:t>
+              <a:t>🧰 Herramientas y preparación</a:t>
             </a:r>
           </a:p>
         </p:txBody>
@@ -4607,82 +4983,37 @@
                   <a:srgbClr val="22282E"/>
                 </a:solidFill>
               </a:rPr>
-              <a:t>•  Reconstruye el esquema de DVGA con introspección y con clairvoyance (deshabilitada).</a:t>
-            </a:r>
-          </a:p>
-          <a:p>
-            <a:pPr>
-              <a:spcAft>
-                <a:spcPts val="600"/>
-              </a:spcAft>
-            </a:pPr>
-            <a:r>
-              <a:rPr sz="1500">
-                <a:solidFill>
-                  <a:srgbClr val="22282E"/>
-                </a:solidFill>
-              </a:rPr>
-              <a:t>•  Explota un IDOR en una query y otro en una mutation.</a:t>
-            </a:r>
-          </a:p>
-          <a:p>
-            <a:pPr>
-              <a:spcAft>
-                <a:spcPts val="600"/>
-              </a:spcAft>
-            </a:pPr>
-            <a:r>
-              <a:rPr sz="1500">
-                <a:solidFill>
-                  <a:srgbClr val="22282E"/>
-                </a:solidFill>
-              </a:rPr>
-              <a:t>•  Usa alias para hacer fuerza bruta en una petición.</a:t>
-            </a:r>
-          </a:p>
-          <a:p>
-            <a:pPr>
-              <a:spcAft>
-                <a:spcPts val="600"/>
-              </a:spcAft>
-            </a:pPr>
-            <a:r>
-              <a:rPr sz="1500">
-                <a:solidFill>
-                  <a:srgbClr val="22282E"/>
-                </a:solidFill>
-              </a:rPr>
-              <a:t>•  Diseña una consulta anidada que dispare un ataque de complejidad.</a:t>
-            </a:r>
-          </a:p>
-          <a:p>
-            <a:pPr>
-              <a:spcAft>
-                <a:spcPts val="600"/>
-              </a:spcAft>
-            </a:pPr>
-            <a:r>
-              <a:rPr sz="1500">
-                <a:solidFill>
-                  <a:srgbClr val="22282E"/>
-                </a:solidFill>
-              </a:rPr>
-              <a:t>•  Explica por qué desactivar introspección en prod reduce (pero no elimina) el riesgo.</a:t>
-            </a:r>
-          </a:p>
-          <a:p>
-            <a:pPr>
-              <a:spcAft>
-                <a:spcPts val="600"/>
-              </a:spcAft>
-            </a:pPr>
-            <a:r>
-              <a:rPr sz="1500">
-                <a:solidFill>
-                  <a:srgbClr val="22282E"/>
-                </a:solidFill>
-              </a:rPr>
-              <a:t>•  Propón límites de profundidad/complejidad y authz por resolver.</a:t>
+              <a:t>•  GraphiQL/Altair o Burp con extensiones InQL.</a:t>
+            </a:r>
+          </a:p>
+          <a:p>
+            <a:pPr>
+              <a:spcAft>
+                <a:spcPts val="600"/>
+              </a:spcAft>
+            </a:pPr>
+            <a:r>
+              <a:rPr sz="1500">
+                <a:solidFill>
+                  <a:srgbClr val="22282E"/>
+                </a:solidFill>
+              </a:rPr>
+              <a:t>•  DVGA (Damn Vulnerable GraphQL Application) como lab.</a:t>
+            </a:r>
+          </a:p>
+          <a:p>
+            <a:pPr>
+              <a:spcAft>
+                <a:spcPts val="600"/>
+              </a:spcAft>
+            </a:pPr>
+            <a:r>
+              <a:rPr sz="1500">
+                <a:solidFill>
+                  <a:srgbClr val="22282E"/>
+                </a:solidFill>
+              </a:rPr>
+              <a:t>•  clairvoyance para reconstruir esquema si la introspección está deshabilitada.</a:t>
             </a:r>
           </a:p>
         </p:txBody>
@@ -4733,7 +5064,7 @@
                   <a:srgbClr val="0B3D2E"/>
                 </a:solidFill>
               </a:rPr>
-              <a:t>📝 Reto verificable</a:t>
+              <a:t>🧪 Laboratorio guiado</a:t>
             </a:r>
           </a:p>
         </p:txBody>
@@ -4771,22 +5102,97 @@
                   <a:srgbClr val="22282E"/>
                 </a:solidFill>
               </a:rPr>
-              <a:t>•  En DVGA, obtén el esquema por introspección, explota una autorización rota (query o mutation) y demuestra un bypass de rate limit con batching/alias.</a:t>
-            </a:r>
-          </a:p>
-          <a:p>
-            <a:pPr>
-              <a:spcAft>
-                <a:spcPts val="600"/>
-              </a:spcAft>
-            </a:pPr>
-            <a:r>
-              <a:rPr sz="1500">
-                <a:solidFill>
-                  <a:srgbClr val="22282E"/>
-                </a:solidFill>
-              </a:rPr>
-              <a:t>•  Criterio de aceptación: entregas el esquema, la operación no autorizada con su evidencia y el batching que elude el límite, más la defensa (introspección off, authz por resolver, límites de complejidad).</a:t>
+              <a:t>•  Localiza el endpoint GraphQL (/graphql, /api/graphql) y prueba la introspección:</a:t>
+            </a:r>
+          </a:p>
+          <a:p>
+            <a:pPr>
+              <a:spcAft>
+                <a:spcPts val="600"/>
+              </a:spcAft>
+            </a:pPr>
+            <a:r>
+              <a:rPr sz="1500">
+                <a:solidFill>
+                  <a:srgbClr val="22282E"/>
+                </a:solidFill>
+              </a:rPr>
+              <a:t>•  Con InQL, genera el mapa de queries y mutations disponibles.</a:t>
+            </a:r>
+          </a:p>
+          <a:p>
+            <a:pPr>
+              <a:spcAft>
+                <a:spcPts val="600"/>
+              </a:spcAft>
+            </a:pPr>
+            <a:r>
+              <a:rPr sz="1500">
+                <a:solidFill>
+                  <a:srgbClr val="22282E"/>
+                </a:solidFill>
+              </a:rPr>
+              <a:t>•  Prueba IDOR/BOLA: consulta un objeto por ID que no es tuyo (user(id: 2){ email }).</a:t>
+            </a:r>
+          </a:p>
+          <a:p>
+            <a:pPr>
+              <a:spcAft>
+                <a:spcPts val="600"/>
+              </a:spcAft>
+            </a:pPr>
+            <a:r>
+              <a:rPr sz="1500">
+                <a:solidFill>
+                  <a:srgbClr val="22282E"/>
+                </a:solidFill>
+              </a:rPr>
+              <a:t>•  Ejecuta una mutation sensible sin el rol adecuado (autorización rota).</a:t>
+            </a:r>
+          </a:p>
+          <a:p>
+            <a:pPr>
+              <a:spcAft>
+                <a:spcPts val="600"/>
+              </a:spcAft>
+            </a:pPr>
+            <a:r>
+              <a:rPr sz="1500">
+                <a:solidFill>
+                  <a:srgbClr val="22282E"/>
+                </a:solidFill>
+              </a:rPr>
+              <a:t>•  Usa alias/batching para repetir un login muchas veces en una sola petición (fuerza bruta sin rate limit).</a:t>
+            </a:r>
+          </a:p>
+          <a:p>
+            <a:pPr>
+              <a:spcAft>
+                <a:spcPts val="600"/>
+              </a:spcAft>
+            </a:pPr>
+            <a:r>
+              <a:rPr sz="1500">
+                <a:solidFill>
+                  <a:srgbClr val="22282E"/>
+                </a:solidFill>
+              </a:rPr>
+              <a:t>•  Lanza una consulta profundamente anidada para evaluar el riesgo de DoS por complejidad.</a:t>
+            </a:r>
+          </a:p>
+          <a:p>
+            <a:pPr>
+              <a:spcAft>
+                <a:spcPts val="600"/>
+              </a:spcAft>
+            </a:pPr>
+            <a:r>
+              <a:rPr sz="1500">
+                <a:solidFill>
+                  <a:srgbClr val="22282E"/>
+                </a:solidFill>
+              </a:rPr>
+              <a:t>•  Documenta introspección, authz rota y el vector de DoS.</a:t>
             </a:r>
           </a:p>
         </p:txBody>
